--- a/dist/초2/수학/수와계산/초2_수학_수와계산_06_곱셈의뜻_학생용.pptx
+++ b/dist/초2/수학/수와계산/초2_수학_수와계산_06_곱셈의뜻_학생용.pptx
@@ -118,38 +118,38 @@
   <p:extLst>
     <p:ext uri="{521415D9-36F7-43E2-AB2F-B90AF26B5E84}">
       <p14:sectionLst xmlns:p14="http://schemas.microsoft.com/office/powerpoint/2010/main">
-        <p14:section name="도입" id="{3af81aff-50a5-80b9-fa11-7b6b4e1240e2}">
+        <p14:section name="도입" id="{034435a8-9480-d01e-41f8-5393c3944540}">
           <p14:sldIdLst>
             <p14:sldId id="256"/>
             <p14:sldId id="257"/>
           </p14:sldIdLst>
         </p14:section>
-        <p14:section name="개념" id="{08389ac7-72f0-04a2-5fa9-e889a666764c}">
+        <p14:section name="개념" id="{d06ee95a-0759-a1a0-af3d-664977e2f0af}">
           <p14:sldIdLst>
             <p14:sldId id="258"/>
             <p14:sldId id="259"/>
             <p14:sldId id="260"/>
           </p14:sldIdLst>
         </p14:section>
-        <p14:section name="연습" id="{0eeb70d8-3237-fd45-b1c0-675f247450bf}">
+        <p14:section name="연습" id="{a661a952-b9be-ec86-8c1f-410891f6ede9}">
           <p14:sldIdLst>
             <p14:sldId id="261"/>
             <p14:sldId id="262"/>
             <p14:sldId id="263"/>
           </p14:sldIdLst>
         </p14:section>
-        <p14:section name="확인" id="{046b531d-c31e-73b2-d219-8df80ed99e03}">
+        <p14:section name="확인" id="{ff735ed7-1126-48fc-4934-49e1dbe39e8e}">
           <p14:sldIdLst>
             <p14:sldId id="264"/>
             <p14:sldId id="265"/>
           </p14:sldIdLst>
         </p14:section>
-        <p14:section name="정리" id="{3d435ca9-51a8-1a51-ec5f-f2ebbe3c868f}">
+        <p14:section name="정리" id="{edeb838b-c416-f9ad-699a-d6fe7605ee23}">
           <p14:sldIdLst>
             <p14:sldId id="266"/>
           </p14:sldIdLst>
         </p14:section>
-        <p14:section name="보충" id="{a9b61d01-c8c8-5efd-a760-532b6cbf0934}">
+        <p14:section name="보충" id="{dad81383-50f7-1bff-f38b-3e290508df17}">
           <p14:sldIdLst>
             <p14:sldId id="267"/>
           </p14:sldIdLst>
@@ -9681,7 +9681,7 @@
         </p:nvSpPr>
         <p:spPr>
           <a:xfrm>
-            <a:off x="2320747" y="2104339"/>
+            <a:off x="2501341" y="2104339"/>
             <a:ext cx="302362" cy="302362"/>
           </a:xfrm>
           <a:prstGeom prst="ellipse">
@@ -9706,7 +9706,7 @@
         </p:nvSpPr>
         <p:spPr>
           <a:xfrm>
-            <a:off x="2808427" y="2104339"/>
+            <a:off x="2989021" y="2104339"/>
             <a:ext cx="302362" cy="302362"/>
           </a:xfrm>
           <a:prstGeom prst="ellipse">
@@ -9731,7 +9731,7 @@
         </p:nvSpPr>
         <p:spPr>
           <a:xfrm>
-            <a:off x="3296107" y="2104339"/>
+            <a:off x="3476701" y="2104339"/>
             <a:ext cx="302362" cy="302362"/>
           </a:xfrm>
           <a:prstGeom prst="ellipse">
@@ -9756,7 +9756,7 @@
         </p:nvSpPr>
         <p:spPr>
           <a:xfrm>
-            <a:off x="3783787" y="2104339"/>
+            <a:off x="3964381" y="2104339"/>
             <a:ext cx="302362" cy="302362"/>
           </a:xfrm>
           <a:prstGeom prst="ellipse">
@@ -9781,7 +9781,7 @@
         </p:nvSpPr>
         <p:spPr>
           <a:xfrm>
-            <a:off x="4271467" y="2104339"/>
+            <a:off x="4452061" y="2104339"/>
             <a:ext cx="302362" cy="302362"/>
           </a:xfrm>
           <a:prstGeom prst="ellipse">
@@ -9806,7 +9806,7 @@
         </p:nvSpPr>
         <p:spPr>
           <a:xfrm>
-            <a:off x="2320747" y="2592019"/>
+            <a:off x="2501341" y="2592019"/>
             <a:ext cx="302362" cy="302362"/>
           </a:xfrm>
           <a:prstGeom prst="ellipse">
@@ -9831,7 +9831,7 @@
         </p:nvSpPr>
         <p:spPr>
           <a:xfrm>
-            <a:off x="2808427" y="2592019"/>
+            <a:off x="2989021" y="2592019"/>
             <a:ext cx="302362" cy="302362"/>
           </a:xfrm>
           <a:prstGeom prst="ellipse">
@@ -9856,7 +9856,7 @@
         </p:nvSpPr>
         <p:spPr>
           <a:xfrm>
-            <a:off x="3296107" y="2592019"/>
+            <a:off x="3476701" y="2592019"/>
             <a:ext cx="302362" cy="302362"/>
           </a:xfrm>
           <a:prstGeom prst="ellipse">
@@ -9881,7 +9881,7 @@
         </p:nvSpPr>
         <p:spPr>
           <a:xfrm>
-            <a:off x="3783787" y="2592019"/>
+            <a:off x="3964381" y="2592019"/>
             <a:ext cx="302362" cy="302362"/>
           </a:xfrm>
           <a:prstGeom prst="ellipse">
@@ -9906,7 +9906,7 @@
         </p:nvSpPr>
         <p:spPr>
           <a:xfrm>
-            <a:off x="4271467" y="2592019"/>
+            <a:off x="4452061" y="2592019"/>
             <a:ext cx="302362" cy="302362"/>
           </a:xfrm>
           <a:prstGeom prst="ellipse">
@@ -9931,7 +9931,7 @@
         </p:nvSpPr>
         <p:spPr>
           <a:xfrm>
-            <a:off x="2320747" y="3079699"/>
+            <a:off x="2501341" y="3079699"/>
             <a:ext cx="302362" cy="302362"/>
           </a:xfrm>
           <a:prstGeom prst="ellipse">
@@ -9956,7 +9956,7 @@
         </p:nvSpPr>
         <p:spPr>
           <a:xfrm>
-            <a:off x="2808427" y="3079699"/>
+            <a:off x="2989021" y="3079699"/>
             <a:ext cx="302362" cy="302362"/>
           </a:xfrm>
           <a:prstGeom prst="ellipse">
@@ -9981,7 +9981,7 @@
         </p:nvSpPr>
         <p:spPr>
           <a:xfrm>
-            <a:off x="3296107" y="3079699"/>
+            <a:off x="3476701" y="3079699"/>
             <a:ext cx="302362" cy="302362"/>
           </a:xfrm>
           <a:prstGeom prst="ellipse">
@@ -10006,7 +10006,7 @@
         </p:nvSpPr>
         <p:spPr>
           <a:xfrm>
-            <a:off x="3783787" y="3079699"/>
+            <a:off x="3964381" y="3079699"/>
             <a:ext cx="302362" cy="302362"/>
           </a:xfrm>
           <a:prstGeom prst="ellipse">
@@ -10031,7 +10031,7 @@
         </p:nvSpPr>
         <p:spPr>
           <a:xfrm>
-            <a:off x="4271467" y="3079699"/>
+            <a:off x="4452061" y="3079699"/>
             <a:ext cx="302362" cy="302362"/>
           </a:xfrm>
           <a:prstGeom prst="ellipse">
@@ -10056,7 +10056,7 @@
         </p:nvSpPr>
         <p:spPr>
           <a:xfrm>
-            <a:off x="2255520" y="2048256"/>
+            <a:off x="2436114" y="2048256"/>
             <a:ext cx="2383536" cy="414528"/>
           </a:xfrm>
           <a:prstGeom prst="roundRect">
@@ -10085,7 +10085,7 @@
         </p:nvSpPr>
         <p:spPr>
           <a:xfrm>
-            <a:off x="2255520" y="2535936"/>
+            <a:off x="2436114" y="2535936"/>
             <a:ext cx="2383536" cy="414528"/>
           </a:xfrm>
           <a:prstGeom prst="roundRect">
@@ -10114,7 +10114,7 @@
         </p:nvSpPr>
         <p:spPr>
           <a:xfrm>
-            <a:off x="2255520" y="3023616"/>
+            <a:off x="2436114" y="3023616"/>
             <a:ext cx="2383536" cy="414528"/>
           </a:xfrm>
           <a:prstGeom prst="roundRect">
@@ -10143,7 +10143,7 @@
         </p:nvSpPr>
         <p:spPr>
           <a:xfrm>
-            <a:off x="2228088" y="2011680"/>
+            <a:off x="2408682" y="2011680"/>
             <a:ext cx="2438400" cy="1463040"/>
           </a:xfrm>
           <a:prstGeom prst="rect">
@@ -10219,7 +10219,7 @@
         </p:nvSpPr>
         <p:spPr>
           <a:xfrm>
-            <a:off x="8879738" y="2081174"/>
+            <a:off x="9060332" y="2081174"/>
             <a:ext cx="226771" cy="226771"/>
           </a:xfrm>
           <a:prstGeom prst="ellipse">
@@ -10244,7 +10244,7 @@
         </p:nvSpPr>
         <p:spPr>
           <a:xfrm>
-            <a:off x="9245498" y="2081174"/>
+            <a:off x="9426092" y="2081174"/>
             <a:ext cx="226771" cy="226771"/>
           </a:xfrm>
           <a:prstGeom prst="ellipse">
@@ -10269,7 +10269,7 @@
         </p:nvSpPr>
         <p:spPr>
           <a:xfrm>
-            <a:off x="8879738" y="2446934"/>
+            <a:off x="9060332" y="2446934"/>
             <a:ext cx="226771" cy="226771"/>
           </a:xfrm>
           <a:prstGeom prst="ellipse">
@@ -10294,7 +10294,7 @@
         </p:nvSpPr>
         <p:spPr>
           <a:xfrm>
-            <a:off x="9245498" y="2446934"/>
+            <a:off x="9426092" y="2446934"/>
             <a:ext cx="226771" cy="226771"/>
           </a:xfrm>
           <a:prstGeom prst="ellipse">
@@ -10319,7 +10319,7 @@
         </p:nvSpPr>
         <p:spPr>
           <a:xfrm>
-            <a:off x="8879738" y="2812694"/>
+            <a:off x="9060332" y="2812694"/>
             <a:ext cx="226771" cy="226771"/>
           </a:xfrm>
           <a:prstGeom prst="ellipse">
@@ -10344,7 +10344,7 @@
         </p:nvSpPr>
         <p:spPr>
           <a:xfrm>
-            <a:off x="9245498" y="2812694"/>
+            <a:off x="9426092" y="2812694"/>
             <a:ext cx="226771" cy="226771"/>
           </a:xfrm>
           <a:prstGeom prst="ellipse">
@@ -10369,7 +10369,7 @@
         </p:nvSpPr>
         <p:spPr>
           <a:xfrm>
-            <a:off x="8879738" y="3178454"/>
+            <a:off x="9060332" y="3178454"/>
             <a:ext cx="226771" cy="226771"/>
           </a:xfrm>
           <a:prstGeom prst="ellipse">
@@ -10394,7 +10394,7 @@
         </p:nvSpPr>
         <p:spPr>
           <a:xfrm>
-            <a:off x="9245498" y="3178454"/>
+            <a:off x="9426092" y="3178454"/>
             <a:ext cx="226771" cy="226771"/>
           </a:xfrm>
           <a:prstGeom prst="ellipse">
@@ -10419,7 +10419,7 @@
         </p:nvSpPr>
         <p:spPr>
           <a:xfrm>
-            <a:off x="8837676" y="2048256"/>
+            <a:off x="9018270" y="2048256"/>
             <a:ext cx="676656" cy="292608"/>
           </a:xfrm>
           <a:prstGeom prst="roundRect">
@@ -10448,7 +10448,7 @@
         </p:nvSpPr>
         <p:spPr>
           <a:xfrm>
-            <a:off x="8837676" y="2414016"/>
+            <a:off x="9018270" y="2414016"/>
             <a:ext cx="676656" cy="292608"/>
           </a:xfrm>
           <a:prstGeom prst="roundRect">
@@ -10477,7 +10477,7 @@
         </p:nvSpPr>
         <p:spPr>
           <a:xfrm>
-            <a:off x="8837676" y="2779776"/>
+            <a:off x="9018270" y="2779776"/>
             <a:ext cx="676656" cy="292608"/>
           </a:xfrm>
           <a:prstGeom prst="roundRect">
@@ -10506,7 +10506,7 @@
         </p:nvSpPr>
         <p:spPr>
           <a:xfrm>
-            <a:off x="8837676" y="3145536"/>
+            <a:off x="9018270" y="3145536"/>
             <a:ext cx="676656" cy="292608"/>
           </a:xfrm>
           <a:prstGeom prst="roundRect">
@@ -10535,7 +10535,7 @@
         </p:nvSpPr>
         <p:spPr>
           <a:xfrm>
-            <a:off x="8810244" y="2011680"/>
+            <a:off x="8990838" y="2011680"/>
             <a:ext cx="731520" cy="1463040"/>
           </a:xfrm>
           <a:prstGeom prst="rect">
@@ -10611,7 +10611,7 @@
         </p:nvSpPr>
         <p:spPr>
           <a:xfrm>
-            <a:off x="1520190" y="3833622"/>
+            <a:off x="1700784" y="3833622"/>
             <a:ext cx="425196" cy="425196"/>
           </a:xfrm>
           <a:prstGeom prst="ellipse">
@@ -10636,7 +10636,7 @@
         </p:nvSpPr>
         <p:spPr>
           <a:xfrm>
-            <a:off x="2205990" y="3833622"/>
+            <a:off x="2386584" y="3833622"/>
             <a:ext cx="425196" cy="425196"/>
           </a:xfrm>
           <a:prstGeom prst="ellipse">
@@ -10661,7 +10661,7 @@
         </p:nvSpPr>
         <p:spPr>
           <a:xfrm>
-            <a:off x="2891790" y="3833622"/>
+            <a:off x="3072384" y="3833622"/>
             <a:ext cx="425196" cy="425196"/>
           </a:xfrm>
           <a:prstGeom prst="ellipse">
@@ -10686,7 +10686,7 @@
         </p:nvSpPr>
         <p:spPr>
           <a:xfrm>
-            <a:off x="3577590" y="3833622"/>
+            <a:off x="3758184" y="3833622"/>
             <a:ext cx="425196" cy="425196"/>
           </a:xfrm>
           <a:prstGeom prst="ellipse">
@@ -10711,7 +10711,7 @@
         </p:nvSpPr>
         <p:spPr>
           <a:xfrm>
-            <a:off x="4263390" y="3833622"/>
+            <a:off x="4443984" y="3833622"/>
             <a:ext cx="425196" cy="425196"/>
           </a:xfrm>
           <a:prstGeom prst="ellipse">
@@ -10736,7 +10736,7 @@
         </p:nvSpPr>
         <p:spPr>
           <a:xfrm>
-            <a:off x="4949190" y="3833622"/>
+            <a:off x="5129784" y="3833622"/>
             <a:ext cx="425196" cy="425196"/>
           </a:xfrm>
           <a:prstGeom prst="ellipse">
@@ -10761,7 +10761,7 @@
         </p:nvSpPr>
         <p:spPr>
           <a:xfrm>
-            <a:off x="1520190" y="4519422"/>
+            <a:off x="1700784" y="4519422"/>
             <a:ext cx="425196" cy="425196"/>
           </a:xfrm>
           <a:prstGeom prst="ellipse">
@@ -10786,7 +10786,7 @@
         </p:nvSpPr>
         <p:spPr>
           <a:xfrm>
-            <a:off x="2205990" y="4519422"/>
+            <a:off x="2386584" y="4519422"/>
             <a:ext cx="425196" cy="425196"/>
           </a:xfrm>
           <a:prstGeom prst="ellipse">
@@ -10811,7 +10811,7 @@
         </p:nvSpPr>
         <p:spPr>
           <a:xfrm>
-            <a:off x="2891790" y="4519422"/>
+            <a:off x="3072384" y="4519422"/>
             <a:ext cx="425196" cy="425196"/>
           </a:xfrm>
           <a:prstGeom prst="ellipse">
@@ -10836,7 +10836,7 @@
         </p:nvSpPr>
         <p:spPr>
           <a:xfrm>
-            <a:off x="3577590" y="4519422"/>
+            <a:off x="3758184" y="4519422"/>
             <a:ext cx="425196" cy="425196"/>
           </a:xfrm>
           <a:prstGeom prst="ellipse">
@@ -10861,7 +10861,7 @@
         </p:nvSpPr>
         <p:spPr>
           <a:xfrm>
-            <a:off x="4263390" y="4519422"/>
+            <a:off x="4443984" y="4519422"/>
             <a:ext cx="425196" cy="425196"/>
           </a:xfrm>
           <a:prstGeom prst="ellipse">
@@ -10886,7 +10886,7 @@
         </p:nvSpPr>
         <p:spPr>
           <a:xfrm>
-            <a:off x="4949190" y="4519422"/>
+            <a:off x="5129784" y="4519422"/>
             <a:ext cx="425196" cy="425196"/>
           </a:xfrm>
           <a:prstGeom prst="ellipse">
@@ -10911,7 +10911,7 @@
         </p:nvSpPr>
         <p:spPr>
           <a:xfrm>
-            <a:off x="1417320" y="3739896"/>
+            <a:off x="1597914" y="3739896"/>
             <a:ext cx="4059936" cy="612648"/>
           </a:xfrm>
           <a:prstGeom prst="roundRect">
@@ -10940,7 +10940,7 @@
         </p:nvSpPr>
         <p:spPr>
           <a:xfrm>
-            <a:off x="1417320" y="4425696"/>
+            <a:off x="1597914" y="4425696"/>
             <a:ext cx="4059936" cy="612648"/>
           </a:xfrm>
           <a:prstGeom prst="roundRect">
@@ -10969,7 +10969,7 @@
         </p:nvSpPr>
         <p:spPr>
           <a:xfrm>
-            <a:off x="1389888" y="3703320"/>
+            <a:off x="1570482" y="3703320"/>
             <a:ext cx="4114800" cy="1371600"/>
           </a:xfrm>
           <a:prstGeom prst="rect">
@@ -11045,7 +11045,7 @@
         </p:nvSpPr>
         <p:spPr>
           <a:xfrm>
-            <a:off x="8537143" y="3750259"/>
+            <a:off x="8717737" y="3750259"/>
             <a:ext cx="302362" cy="302362"/>
           </a:xfrm>
           <a:prstGeom prst="ellipse">
@@ -11070,7 +11070,7 @@
         </p:nvSpPr>
         <p:spPr>
           <a:xfrm>
-            <a:off x="9024823" y="3750259"/>
+            <a:off x="9205417" y="3750259"/>
             <a:ext cx="302362" cy="302362"/>
           </a:xfrm>
           <a:prstGeom prst="ellipse">
@@ -11095,7 +11095,7 @@
         </p:nvSpPr>
         <p:spPr>
           <a:xfrm>
-            <a:off x="9512503" y="3750259"/>
+            <a:off x="9693097" y="3750259"/>
             <a:ext cx="302362" cy="302362"/>
           </a:xfrm>
           <a:prstGeom prst="ellipse">
@@ -11120,7 +11120,7 @@
         </p:nvSpPr>
         <p:spPr>
           <a:xfrm>
-            <a:off x="8537143" y="4237939"/>
+            <a:off x="8717737" y="4237939"/>
             <a:ext cx="302362" cy="302362"/>
           </a:xfrm>
           <a:prstGeom prst="ellipse">
@@ -11145,7 +11145,7 @@
         </p:nvSpPr>
         <p:spPr>
           <a:xfrm>
-            <a:off x="9024823" y="4237939"/>
+            <a:off x="9205417" y="4237939"/>
             <a:ext cx="302362" cy="302362"/>
           </a:xfrm>
           <a:prstGeom prst="ellipse">
@@ -11170,7 +11170,7 @@
         </p:nvSpPr>
         <p:spPr>
           <a:xfrm>
-            <a:off x="9512503" y="4237939"/>
+            <a:off x="9693097" y="4237939"/>
             <a:ext cx="302362" cy="302362"/>
           </a:xfrm>
           <a:prstGeom prst="ellipse">
@@ -11195,7 +11195,7 @@
         </p:nvSpPr>
         <p:spPr>
           <a:xfrm>
-            <a:off x="8537143" y="4725619"/>
+            <a:off x="8717737" y="4725619"/>
             <a:ext cx="302362" cy="302362"/>
           </a:xfrm>
           <a:prstGeom prst="ellipse">
@@ -11220,7 +11220,7 @@
         </p:nvSpPr>
         <p:spPr>
           <a:xfrm>
-            <a:off x="9024823" y="4725619"/>
+            <a:off x="9205417" y="4725619"/>
             <a:ext cx="302362" cy="302362"/>
           </a:xfrm>
           <a:prstGeom prst="ellipse">
@@ -11245,7 +11245,7 @@
         </p:nvSpPr>
         <p:spPr>
           <a:xfrm>
-            <a:off x="9512503" y="4725619"/>
+            <a:off x="9693097" y="4725619"/>
             <a:ext cx="302362" cy="302362"/>
           </a:xfrm>
           <a:prstGeom prst="ellipse">
@@ -11270,7 +11270,7 @@
         </p:nvSpPr>
         <p:spPr>
           <a:xfrm>
-            <a:off x="8471916" y="3694176"/>
+            <a:off x="8652510" y="3694176"/>
             <a:ext cx="1408176" cy="414528"/>
           </a:xfrm>
           <a:prstGeom prst="roundRect">
@@ -11299,7 +11299,7 @@
         </p:nvSpPr>
         <p:spPr>
           <a:xfrm>
-            <a:off x="8471916" y="4181856"/>
+            <a:off x="8652510" y="4181856"/>
             <a:ext cx="1408176" cy="414528"/>
           </a:xfrm>
           <a:prstGeom prst="roundRect">
@@ -11328,7 +11328,7 @@
         </p:nvSpPr>
         <p:spPr>
           <a:xfrm>
-            <a:off x="8471916" y="4669536"/>
+            <a:off x="8652510" y="4669536"/>
             <a:ext cx="1408176" cy="414528"/>
           </a:xfrm>
           <a:prstGeom prst="roundRect">
@@ -11357,7 +11357,7 @@
         </p:nvSpPr>
         <p:spPr>
           <a:xfrm>
-            <a:off x="8444484" y="3657600"/>
+            <a:off x="8625078" y="3657600"/>
             <a:ext cx="1463040" cy="1463040"/>
           </a:xfrm>
           <a:prstGeom prst="rect">
@@ -12079,7 +12079,7 @@
         </p:nvSpPr>
         <p:spPr>
           <a:xfrm>
-            <a:off x="2391156" y="2098548"/>
+            <a:off x="3031236" y="2098548"/>
             <a:ext cx="283464" cy="283464"/>
           </a:xfrm>
           <a:prstGeom prst="ellipse">
@@ -12104,7 +12104,7 @@
         </p:nvSpPr>
         <p:spPr>
           <a:xfrm>
-            <a:off x="2848356" y="2098548"/>
+            <a:off x="3488436" y="2098548"/>
             <a:ext cx="283464" cy="283464"/>
           </a:xfrm>
           <a:prstGeom prst="ellipse">
@@ -12129,7 +12129,7 @@
         </p:nvSpPr>
         <p:spPr>
           <a:xfrm>
-            <a:off x="3305556" y="2098548"/>
+            <a:off x="3945636" y="2098548"/>
             <a:ext cx="283464" cy="283464"/>
           </a:xfrm>
           <a:prstGeom prst="ellipse">
@@ -12154,7 +12154,7 @@
         </p:nvSpPr>
         <p:spPr>
           <a:xfrm>
-            <a:off x="3762756" y="2098548"/>
+            <a:off x="4402836" y="2098548"/>
             <a:ext cx="283464" cy="283464"/>
           </a:xfrm>
           <a:prstGeom prst="ellipse">
@@ -12179,7 +12179,7 @@
         </p:nvSpPr>
         <p:spPr>
           <a:xfrm>
-            <a:off x="4219956" y="2098548"/>
+            <a:off x="4860036" y="2098548"/>
             <a:ext cx="283464" cy="283464"/>
           </a:xfrm>
           <a:prstGeom prst="ellipse">
@@ -12204,7 +12204,7 @@
         </p:nvSpPr>
         <p:spPr>
           <a:xfrm>
-            <a:off x="2391156" y="2555748"/>
+            <a:off x="3031236" y="2555748"/>
             <a:ext cx="283464" cy="283464"/>
           </a:xfrm>
           <a:prstGeom prst="ellipse">
@@ -12229,7 +12229,7 @@
         </p:nvSpPr>
         <p:spPr>
           <a:xfrm>
-            <a:off x="2848356" y="2555748"/>
+            <a:off x="3488436" y="2555748"/>
             <a:ext cx="283464" cy="283464"/>
           </a:xfrm>
           <a:prstGeom prst="ellipse">
@@ -12254,7 +12254,7 @@
         </p:nvSpPr>
         <p:spPr>
           <a:xfrm>
-            <a:off x="3305556" y="2555748"/>
+            <a:off x="3945636" y="2555748"/>
             <a:ext cx="283464" cy="283464"/>
           </a:xfrm>
           <a:prstGeom prst="ellipse">
@@ -12279,7 +12279,7 @@
         </p:nvSpPr>
         <p:spPr>
           <a:xfrm>
-            <a:off x="3762756" y="2555748"/>
+            <a:off x="4402836" y="2555748"/>
             <a:ext cx="283464" cy="283464"/>
           </a:xfrm>
           <a:prstGeom prst="ellipse">
@@ -12304,7 +12304,7 @@
         </p:nvSpPr>
         <p:spPr>
           <a:xfrm>
-            <a:off x="4219956" y="2555748"/>
+            <a:off x="4860036" y="2555748"/>
             <a:ext cx="283464" cy="283464"/>
           </a:xfrm>
           <a:prstGeom prst="ellipse">
@@ -12329,7 +12329,7 @@
         </p:nvSpPr>
         <p:spPr>
           <a:xfrm>
-            <a:off x="2331720" y="2048256"/>
+            <a:off x="2971800" y="2048256"/>
             <a:ext cx="2231136" cy="384048"/>
           </a:xfrm>
           <a:prstGeom prst="roundRect">
@@ -12358,7 +12358,7 @@
         </p:nvSpPr>
         <p:spPr>
           <a:xfrm>
-            <a:off x="2331720" y="2505456"/>
+            <a:off x="2971800" y="2505456"/>
             <a:ext cx="2231136" cy="384048"/>
           </a:xfrm>
           <a:prstGeom prst="roundRect">
@@ -12387,7 +12387,7 @@
         </p:nvSpPr>
         <p:spPr>
           <a:xfrm>
-            <a:off x="2304288" y="2011680"/>
+            <a:off x="2944368" y="2011680"/>
             <a:ext cx="2286000" cy="914400"/>
           </a:xfrm>
           <a:prstGeom prst="rect">
@@ -12741,7 +12741,7 @@
         </p:nvSpPr>
         <p:spPr>
           <a:xfrm>
-            <a:off x="548640" y="2459736"/>
+            <a:off x="548640" y="2734056"/>
             <a:ext cx="566928" cy="566928"/>
           </a:xfrm>
           <a:prstGeom prst="roundRect">
@@ -12788,8 +12788,8 @@
         </p:nvSpPr>
         <p:spPr>
           <a:xfrm>
-            <a:off x="2602382" y="2081174"/>
-            <a:ext cx="226771" cy="226771"/>
+            <a:off x="2466137" y="2107235"/>
+            <a:ext cx="311810" cy="311810"/>
           </a:xfrm>
           <a:prstGeom prst="ellipse">
             <a:avLst/>
@@ -12813,8 +12813,8 @@
         </p:nvSpPr>
         <p:spPr>
           <a:xfrm>
-            <a:off x="2968142" y="2081174"/>
-            <a:ext cx="226771" cy="226771"/>
+            <a:off x="2969057" y="2107235"/>
+            <a:ext cx="311810" cy="311810"/>
           </a:xfrm>
           <a:prstGeom prst="ellipse">
             <a:avLst/>
@@ -12838,8 +12838,8 @@
         </p:nvSpPr>
         <p:spPr>
           <a:xfrm>
-            <a:off x="3333902" y="2081174"/>
-            <a:ext cx="226771" cy="226771"/>
+            <a:off x="3471977" y="2107235"/>
+            <a:ext cx="311810" cy="311810"/>
           </a:xfrm>
           <a:prstGeom prst="ellipse">
             <a:avLst/>
@@ -12863,8 +12863,8 @@
         </p:nvSpPr>
         <p:spPr>
           <a:xfrm>
-            <a:off x="3699662" y="2081174"/>
-            <a:ext cx="226771" cy="226771"/>
+            <a:off x="3974897" y="2107235"/>
+            <a:ext cx="311810" cy="311810"/>
           </a:xfrm>
           <a:prstGeom prst="ellipse">
             <a:avLst/>
@@ -12888,8 +12888,8 @@
         </p:nvSpPr>
         <p:spPr>
           <a:xfrm>
-            <a:off x="4065422" y="2081174"/>
-            <a:ext cx="226771" cy="226771"/>
+            <a:off x="4477817" y="2107235"/>
+            <a:ext cx="311810" cy="311810"/>
           </a:xfrm>
           <a:prstGeom prst="ellipse">
             <a:avLst/>
@@ -12913,8 +12913,8 @@
         </p:nvSpPr>
         <p:spPr>
           <a:xfrm>
-            <a:off x="2602382" y="2446934"/>
-            <a:ext cx="226771" cy="226771"/>
+            <a:off x="2466137" y="2610155"/>
+            <a:ext cx="311810" cy="311810"/>
           </a:xfrm>
           <a:prstGeom prst="ellipse">
             <a:avLst/>
@@ -12938,8 +12938,8 @@
         </p:nvSpPr>
         <p:spPr>
           <a:xfrm>
-            <a:off x="2968142" y="2446934"/>
-            <a:ext cx="226771" cy="226771"/>
+            <a:off x="2969057" y="2610155"/>
+            <a:ext cx="311810" cy="311810"/>
           </a:xfrm>
           <a:prstGeom prst="ellipse">
             <a:avLst/>
@@ -12963,8 +12963,8 @@
         </p:nvSpPr>
         <p:spPr>
           <a:xfrm>
-            <a:off x="3333902" y="2446934"/>
-            <a:ext cx="226771" cy="226771"/>
+            <a:off x="3471977" y="2610155"/>
+            <a:ext cx="311810" cy="311810"/>
           </a:xfrm>
           <a:prstGeom prst="ellipse">
             <a:avLst/>
@@ -12988,8 +12988,8 @@
         </p:nvSpPr>
         <p:spPr>
           <a:xfrm>
-            <a:off x="3699662" y="2446934"/>
-            <a:ext cx="226771" cy="226771"/>
+            <a:off x="3974897" y="2610155"/>
+            <a:ext cx="311810" cy="311810"/>
           </a:xfrm>
           <a:prstGeom prst="ellipse">
             <a:avLst/>
@@ -13013,8 +13013,8 @@
         </p:nvSpPr>
         <p:spPr>
           <a:xfrm>
-            <a:off x="4065422" y="2446934"/>
-            <a:ext cx="226771" cy="226771"/>
+            <a:off x="4477817" y="2610155"/>
+            <a:ext cx="311810" cy="311810"/>
           </a:xfrm>
           <a:prstGeom prst="ellipse">
             <a:avLst/>
@@ -13038,8 +13038,8 @@
         </p:nvSpPr>
         <p:spPr>
           <a:xfrm>
-            <a:off x="2602382" y="2812694"/>
-            <a:ext cx="226771" cy="226771"/>
+            <a:off x="2466137" y="3113075"/>
+            <a:ext cx="311810" cy="311810"/>
           </a:xfrm>
           <a:prstGeom prst="ellipse">
             <a:avLst/>
@@ -13063,8 +13063,8 @@
         </p:nvSpPr>
         <p:spPr>
           <a:xfrm>
-            <a:off x="2968142" y="2812694"/>
-            <a:ext cx="226771" cy="226771"/>
+            <a:off x="2969057" y="3113075"/>
+            <a:ext cx="311810" cy="311810"/>
           </a:xfrm>
           <a:prstGeom prst="ellipse">
             <a:avLst/>
@@ -13088,8 +13088,8 @@
         </p:nvSpPr>
         <p:spPr>
           <a:xfrm>
-            <a:off x="3333902" y="2812694"/>
-            <a:ext cx="226771" cy="226771"/>
+            <a:off x="3471977" y="3113075"/>
+            <a:ext cx="311810" cy="311810"/>
           </a:xfrm>
           <a:prstGeom prst="ellipse">
             <a:avLst/>
@@ -13113,8 +13113,8 @@
         </p:nvSpPr>
         <p:spPr>
           <a:xfrm>
-            <a:off x="3699662" y="2812694"/>
-            <a:ext cx="226771" cy="226771"/>
+            <a:off x="3974897" y="3113075"/>
+            <a:ext cx="311810" cy="311810"/>
           </a:xfrm>
           <a:prstGeom prst="ellipse">
             <a:avLst/>
@@ -13138,8 +13138,8 @@
         </p:nvSpPr>
         <p:spPr>
           <a:xfrm>
-            <a:off x="4065422" y="2812694"/>
-            <a:ext cx="226771" cy="226771"/>
+            <a:off x="4477817" y="3113075"/>
+            <a:ext cx="311810" cy="311810"/>
           </a:xfrm>
           <a:prstGeom prst="ellipse">
             <a:avLst/>
@@ -13163,8 +13163,8 @@
         </p:nvSpPr>
         <p:spPr>
           <a:xfrm>
-            <a:off x="2602382" y="3178454"/>
-            <a:ext cx="226771" cy="226771"/>
+            <a:off x="2466137" y="3615995"/>
+            <a:ext cx="311810" cy="311810"/>
           </a:xfrm>
           <a:prstGeom prst="ellipse">
             <a:avLst/>
@@ -13188,8 +13188,8 @@
         </p:nvSpPr>
         <p:spPr>
           <a:xfrm>
-            <a:off x="2968142" y="3178454"/>
-            <a:ext cx="226771" cy="226771"/>
+            <a:off x="2969057" y="3615995"/>
+            <a:ext cx="311810" cy="311810"/>
           </a:xfrm>
           <a:prstGeom prst="ellipse">
             <a:avLst/>
@@ -13213,8 +13213,8 @@
         </p:nvSpPr>
         <p:spPr>
           <a:xfrm>
-            <a:off x="3333902" y="3178454"/>
-            <a:ext cx="226771" cy="226771"/>
+            <a:off x="3471977" y="3615995"/>
+            <a:ext cx="311810" cy="311810"/>
           </a:xfrm>
           <a:prstGeom prst="ellipse">
             <a:avLst/>
@@ -13238,8 +13238,8 @@
         </p:nvSpPr>
         <p:spPr>
           <a:xfrm>
-            <a:off x="3699662" y="3178454"/>
-            <a:ext cx="226771" cy="226771"/>
+            <a:off x="3974897" y="3615995"/>
+            <a:ext cx="311810" cy="311810"/>
           </a:xfrm>
           <a:prstGeom prst="ellipse">
             <a:avLst/>
@@ -13263,8 +13263,8 @@
         </p:nvSpPr>
         <p:spPr>
           <a:xfrm>
-            <a:off x="4065422" y="3178454"/>
-            <a:ext cx="226771" cy="226771"/>
+            <a:off x="4477817" y="3615995"/>
+            <a:ext cx="311810" cy="311810"/>
           </a:xfrm>
           <a:prstGeom prst="ellipse">
             <a:avLst/>
@@ -13288,12 +13288,12 @@
         </p:nvSpPr>
         <p:spPr>
           <a:xfrm>
-            <a:off x="2560320" y="2048256"/>
-            <a:ext cx="1773936" cy="292608"/>
+            <a:off x="2398014" y="2048256"/>
+            <a:ext cx="2459736" cy="429768"/>
           </a:xfrm>
           <a:prstGeom prst="roundRect">
             <a:avLst>
-              <a:gd name="adj" fmla="val 37500"/>
+              <a:gd name="adj" fmla="val 25532"/>
             </a:avLst>
           </a:prstGeom>
           <a:solidFill>
@@ -13317,12 +13317,12 @@
         </p:nvSpPr>
         <p:spPr>
           <a:xfrm>
-            <a:off x="2560320" y="2414016"/>
-            <a:ext cx="1773936" cy="292608"/>
+            <a:off x="2398014" y="2551176"/>
+            <a:ext cx="2459736" cy="429768"/>
           </a:xfrm>
           <a:prstGeom prst="roundRect">
             <a:avLst>
-              <a:gd name="adj" fmla="val 37500"/>
+              <a:gd name="adj" fmla="val 25532"/>
             </a:avLst>
           </a:prstGeom>
           <a:solidFill>
@@ -13346,12 +13346,12 @@
         </p:nvSpPr>
         <p:spPr>
           <a:xfrm>
-            <a:off x="2560320" y="2779776"/>
-            <a:ext cx="1773936" cy="292608"/>
+            <a:off x="2398014" y="3054096"/>
+            <a:ext cx="2459736" cy="429768"/>
           </a:xfrm>
           <a:prstGeom prst="roundRect">
             <a:avLst>
-              <a:gd name="adj" fmla="val 37500"/>
+              <a:gd name="adj" fmla="val 25532"/>
             </a:avLst>
           </a:prstGeom>
           <a:solidFill>
@@ -13375,12 +13375,12 @@
         </p:nvSpPr>
         <p:spPr>
           <a:xfrm>
-            <a:off x="2560320" y="3145536"/>
-            <a:ext cx="1773936" cy="292608"/>
+            <a:off x="2398014" y="3557016"/>
+            <a:ext cx="2459736" cy="429768"/>
           </a:xfrm>
           <a:prstGeom prst="roundRect">
             <a:avLst>
-              <a:gd name="adj" fmla="val 37500"/>
+              <a:gd name="adj" fmla="val 25532"/>
             </a:avLst>
           </a:prstGeom>
           <a:solidFill>
@@ -13404,8 +13404,8 @@
         </p:nvSpPr>
         <p:spPr>
           <a:xfrm>
-            <a:off x="2532888" y="2011680"/>
-            <a:ext cx="1828800" cy="1463040"/>
+            <a:off x="2370582" y="2011680"/>
+            <a:ext cx="2514600" cy="2011680"/>
           </a:xfrm>
           <a:prstGeom prst="rect">
             <a:avLst/>
